--- a/IOHE.pptx
+++ b/IOHE.pptx
@@ -5,10 +5,10 @@
     <p:sldMasterId id="2147483684" r:id="rId1"/>
   </p:sldMasterIdLst>
   <p:notesMasterIdLst>
-    <p:notesMasterId r:id="rId15"/>
+    <p:notesMasterId r:id="rId16"/>
   </p:notesMasterIdLst>
   <p:sldIdLst>
-    <p:sldId id="268" r:id="rId2"/>
+    <p:sldId id="283" r:id="rId2"/>
     <p:sldId id="267" r:id="rId3"/>
     <p:sldId id="271" r:id="rId4"/>
     <p:sldId id="273" r:id="rId5"/>
@@ -21,6 +21,7 @@
     <p:sldId id="282" r:id="rId12"/>
     <p:sldId id="278" r:id="rId13"/>
     <p:sldId id="279" r:id="rId14"/>
+    <p:sldId id="284" r:id="rId15"/>
   </p:sldIdLst>
   <p:sldSz cx="9144000" cy="6858000" type="screen4x3"/>
   <p:notesSz cx="6858000" cy="9144000"/>
@@ -220,7 +221,7 @@
           <a:p>
             <a:fld id="{035856B9-C406-4639-9067-2E395665B7D5}" type="datetimeFigureOut">
               <a:rPr lang="en-US" smtClean="0"/>
-              <a:t>4/28/2026</a:t>
+              <a:t>5/13/2026</a:t>
             </a:fld>
             <a:endParaRPr lang="en-US" dirty="0"/>
           </a:p>
@@ -676,7 +677,7 @@
           <a:p>
             <a:fld id="{2BF24FC6-CC00-43B9-976D-7955F6CEF0B6}" type="datetime1">
               <a:rPr lang="en-US" smtClean="0"/>
-              <a:t>4/28/2026</a:t>
+              <a:t>5/13/2026</a:t>
             </a:fld>
             <a:endParaRPr lang="en-US" dirty="0"/>
           </a:p>
@@ -1095,7 +1096,7 @@
           <a:p>
             <a:fld id="{E7D1606C-8471-48E2-AD56-D4DC599AB0D1}" type="datetime1">
               <a:rPr lang="en-US" smtClean="0"/>
-              <a:t>4/28/2026</a:t>
+              <a:t>5/13/2026</a:t>
             </a:fld>
             <a:endParaRPr lang="en-US" dirty="0"/>
           </a:p>
@@ -1200,7 +1201,7 @@
           <a:p>
             <a:fld id="{A2F99AD2-C03F-4EF6-8A86-1D75233D7BD7}" type="datetime1">
               <a:rPr lang="en-US" smtClean="0"/>
-              <a:t>4/28/2026</a:t>
+              <a:t>5/13/2026</a:t>
             </a:fld>
             <a:endParaRPr lang="en-US" dirty="0"/>
           </a:p>
@@ -1439,7 +1440,7 @@
           <a:p>
             <a:fld id="{FD6591F3-80F4-4429-9759-5593A06E962D}" type="datetime1">
               <a:rPr lang="en-US" smtClean="0"/>
-              <a:t>4/28/2026</a:t>
+              <a:t>5/13/2026</a:t>
             </a:fld>
             <a:endParaRPr lang="en-US" dirty="0"/>
           </a:p>
@@ -2274,14 +2275,50 @@
       </p:grpSpPr>
       <p:sp>
         <p:nvSpPr>
-          <p:cNvPr id="4" name="TextBox 3"/>
+          <p:cNvPr id="2" name="Slide Number Placeholder 1">
+            <a:extLst>
+              <a:ext uri="{FF2B5EF4-FFF2-40B4-BE49-F238E27FC236}">
+                <a16:creationId xmlns:a16="http://schemas.microsoft.com/office/drawing/2014/main" id="{393231E2-C615-1E9C-4360-C5ADB62429B7}"/>
+              </a:ext>
+            </a:extLst>
+          </p:cNvPr>
+          <p:cNvSpPr>
+            <a:spLocks noGrp="1"/>
+          </p:cNvSpPr>
+          <p:nvPr>
+            <p:ph type="sldNum" sz="quarter" idx="12"/>
+          </p:nvPr>
+        </p:nvSpPr>
+        <p:spPr/>
+        <p:txBody>
+          <a:bodyPr/>
+          <a:lstStyle/>
+          <a:p>
+            <a:fld id="{0F8887D6-2A35-42AC-99C1-5E14D32EE4CF}" type="slidenum">
+              <a:rPr lang="en-US" smtClean="0"/>
+              <a:pPr/>
+              <a:t>1</a:t>
+            </a:fld>
+            <a:endParaRPr lang="en-US" dirty="0"/>
+          </a:p>
+        </p:txBody>
+      </p:sp>
+      <p:sp>
+        <p:nvSpPr>
+          <p:cNvPr id="4" name="TextBox 3">
+            <a:extLst>
+              <a:ext uri="{FF2B5EF4-FFF2-40B4-BE49-F238E27FC236}">
+                <a16:creationId xmlns:a16="http://schemas.microsoft.com/office/drawing/2014/main" id="{18EEE4B9-3EA1-FDB6-E07B-DF14EF48A849}"/>
+              </a:ext>
+            </a:extLst>
+          </p:cNvPr>
           <p:cNvSpPr txBox="1"/>
           <p:nvPr/>
         </p:nvSpPr>
         <p:spPr>
           <a:xfrm>
-            <a:off x="1029544" y="1250757"/>
-            <a:ext cx="6624736" cy="646331"/>
+            <a:off x="426368" y="889843"/>
+            <a:ext cx="8291264" cy="5124480"/>
           </a:xfrm>
           <a:prstGeom prst="rect">
             <a:avLst/>
@@ -2289,253 +2326,181 @@
           <a:noFill/>
         </p:spPr>
         <p:txBody>
-          <a:bodyPr wrap="square" rtlCol="0">
+          <a:bodyPr wrap="square">
             <a:spAutoFit/>
           </a:bodyPr>
           <a:lstStyle/>
           <a:p>
+            <a:endParaRPr lang="en-US" dirty="0">
+              <a:latin typeface="Times New Roman" panose="02020603050405020304" pitchFamily="18" charset="0"/>
+              <a:cs typeface="Times New Roman" panose="02020603050405020304" pitchFamily="18" charset="0"/>
+            </a:endParaRPr>
+          </a:p>
+          <a:p>
             <a:pPr algn="ctr"/>
             <a:r>
-              <a:rPr lang="en-US" sz="3600" dirty="0">
-                <a:solidFill>
-                  <a:srgbClr val="FF0000"/>
-                </a:solidFill>
-                <a:latin typeface="Arial Black" pitchFamily="34" charset="0"/>
-              </a:rPr>
-              <a:t>IOHE Project</a:t>
-            </a:r>
-          </a:p>
-        </p:txBody>
-      </p:sp>
-      <p:sp>
-        <p:nvSpPr>
-          <p:cNvPr id="5" name="TextBox 4"/>
-          <p:cNvSpPr txBox="1"/>
-          <p:nvPr/>
-        </p:nvSpPr>
-        <p:spPr>
-          <a:xfrm>
-            <a:off x="3275856" y="4653136"/>
-            <a:ext cx="255198" cy="954107"/>
-          </a:xfrm>
-          <a:prstGeom prst="rect">
-            <a:avLst/>
-          </a:prstGeom>
-          <a:noFill/>
-        </p:spPr>
-        <p:txBody>
-          <a:bodyPr wrap="none" rtlCol="0">
-            <a:spAutoFit/>
-          </a:bodyPr>
-          <a:lstStyle/>
-          <a:p>
-            <a:r>
-              <a:rPr lang="en-US" sz="2000" dirty="0">
-                <a:latin typeface="Times New Roman" pitchFamily="18" charset="0"/>
-                <a:cs typeface="Times New Roman" pitchFamily="18" charset="0"/>
-              </a:rPr>
-              <a:t>:</a:t>
-            </a:r>
-          </a:p>
-          <a:p>
-            <a:endParaRPr lang="en-US" dirty="0"/>
-          </a:p>
-          <a:p>
-            <a:endParaRPr lang="en-US" dirty="0"/>
-          </a:p>
-        </p:txBody>
-      </p:sp>
-      <p:sp>
-        <p:nvSpPr>
-          <p:cNvPr id="6" name="TextBox 5">
-            <a:extLst>
-              <a:ext uri="{FF2B5EF4-FFF2-40B4-BE49-F238E27FC236}">
-                <a16:creationId xmlns:a16="http://schemas.microsoft.com/office/drawing/2014/main" id="{39596CC0-0544-9FD2-7AFD-B23ECB7AE8F4}"/>
-              </a:ext>
-            </a:extLst>
-          </p:cNvPr>
-          <p:cNvSpPr txBox="1"/>
-          <p:nvPr/>
-        </p:nvSpPr>
-        <p:spPr>
-          <a:xfrm>
-            <a:off x="1907704" y="2780928"/>
-            <a:ext cx="5112568" cy="2246769"/>
-          </a:xfrm>
-          <a:prstGeom prst="rect">
-            <a:avLst/>
-          </a:prstGeom>
-          <a:solidFill>
-            <a:schemeClr val="accent6">
-              <a:lumMod val="60000"/>
-              <a:lumOff val="40000"/>
-            </a:schemeClr>
-          </a:solidFill>
-        </p:spPr>
-        <p:txBody>
-          <a:bodyPr wrap="square" rtlCol="0">
-            <a:spAutoFit/>
-          </a:bodyPr>
-          <a:lstStyle/>
-          <a:p>
-            <a:r>
-              <a:rPr lang="en-US" sz="2000" b="1" dirty="0"/>
-              <a:t>Team Details:</a:t>
-            </a:r>
-          </a:p>
-          <a:p>
-            <a:r>
-              <a:rPr lang="en-US" sz="2000" dirty="0"/>
-              <a:t>           Anisha Singh           2210991274</a:t>
-            </a:r>
-          </a:p>
-          <a:p>
-            <a:r>
-              <a:rPr lang="en-US" sz="2000" dirty="0"/>
-              <a:t>           Anubha Khanna      2210991313</a:t>
-            </a:r>
-          </a:p>
-          <a:p>
-            <a:r>
-              <a:rPr lang="en-US" sz="2000" dirty="0"/>
-              <a:t>           Ansh Goyal              2210991294</a:t>
-            </a:r>
-          </a:p>
-          <a:p>
-            <a:r>
-              <a:rPr lang="en-US" sz="2000" dirty="0">
-                <a:solidFill>
-                  <a:schemeClr val="bg1"/>
-                </a:solidFill>
-              </a:rPr>
-              <a:t>           </a:t>
-            </a:r>
-            <a:r>
-              <a:rPr lang="en-US" sz="2000" dirty="0"/>
-              <a:t>Abhijeet Sharma    2210991150</a:t>
-            </a:r>
-            <a:endParaRPr lang="en-US" dirty="0"/>
-          </a:p>
-          <a:p>
-            <a:r>
               <a:rPr lang="en-US" sz="2000" b="1" dirty="0">
-                <a:latin typeface="Times New Roman" pitchFamily="18" charset="0"/>
-                <a:cs typeface="Times New Roman" pitchFamily="18" charset="0"/>
-              </a:rPr>
-              <a:t>Supervised by</a:t>
-            </a:r>
-            <a:r>
-              <a:rPr lang="en-US" sz="2000" dirty="0">
-                <a:latin typeface="Times New Roman" pitchFamily="18" charset="0"/>
-                <a:cs typeface="Times New Roman" pitchFamily="18" charset="0"/>
-              </a:rPr>
-              <a:t>: </a:t>
-            </a:r>
+                <a:latin typeface="Times New Roman" panose="02020603050405020304" pitchFamily="18" charset="0"/>
+                <a:cs typeface="Times New Roman" panose="02020603050405020304" pitchFamily="18" charset="0"/>
+              </a:rPr>
+              <a:t>Project Presentation of Industry Oriented Hands on Experience (22CS422)</a:t>
+            </a:r>
+          </a:p>
+          <a:p>
+            <a:pPr algn="ctr"/>
             <a:endParaRPr lang="en-US" dirty="0">
-              <a:solidFill>
-                <a:schemeClr val="bg1"/>
-              </a:solidFill>
+              <a:latin typeface="Times New Roman" panose="02020603050405020304" pitchFamily="18" charset="0"/>
+              <a:cs typeface="Times New Roman" panose="02020603050405020304" pitchFamily="18" charset="0"/>
             </a:endParaRPr>
           </a:p>
           <a:p>
+            <a:pPr algn="ctr"/>
             <a:r>
               <a:rPr lang="en-US" dirty="0">
-                <a:solidFill>
-                  <a:schemeClr val="tx1">
-                    <a:lumMod val="95000"/>
-                    <a:lumOff val="5000"/>
-                  </a:schemeClr>
-                </a:solidFill>
-              </a:rPr>
-              <a:t>            </a:t>
-            </a:r>
-            <a:r>
-              <a:rPr lang="en-US" sz="2000" dirty="0">
-                <a:solidFill>
-                  <a:schemeClr val="tx1">
-                    <a:lumMod val="95000"/>
-                    <a:lumOff val="5000"/>
-                  </a:schemeClr>
-                </a:solidFill>
-              </a:rPr>
-              <a:t>Mr. Ajay Kumar</a:t>
-            </a:r>
-          </a:p>
-        </p:txBody>
-      </p:sp>
-      <p:sp>
-        <p:nvSpPr>
-          <p:cNvPr id="9" name="TextBox 8"/>
-          <p:cNvSpPr txBox="1"/>
-          <p:nvPr/>
-        </p:nvSpPr>
-        <p:spPr>
-          <a:xfrm>
-            <a:off x="1187624" y="5661248"/>
-            <a:ext cx="6947095" cy="707886"/>
-          </a:xfrm>
-          <a:prstGeom prst="rect">
-            <a:avLst/>
-          </a:prstGeom>
-          <a:noFill/>
-        </p:spPr>
-        <p:txBody>
-          <a:bodyPr wrap="none" rtlCol="0">
-            <a:spAutoFit/>
-          </a:bodyPr>
-          <a:lstStyle/>
-          <a:p>
-            <a:r>
-              <a:rPr lang="en-US" sz="2000" b="1" dirty="0">
-                <a:solidFill>
-                  <a:srgbClr val="FF0000"/>
-                </a:solidFill>
-                <a:latin typeface="Times New Roman" pitchFamily="18" charset="0"/>
-                <a:cs typeface="Times New Roman" pitchFamily="18" charset="0"/>
-              </a:rPr>
-              <a:t>Chitkara University Institute of Engineering and Technology, </a:t>
+                <a:latin typeface="Times New Roman" panose="02020603050405020304" pitchFamily="18" charset="0"/>
+                <a:cs typeface="Times New Roman" panose="02020603050405020304" pitchFamily="18" charset="0"/>
+              </a:rPr>
+              <a:t>On</a:t>
             </a:r>
           </a:p>
           <a:p>
             <a:pPr algn="ctr"/>
-            <a:r>
-              <a:rPr lang="en-US" sz="2000" b="1" dirty="0">
-                <a:solidFill>
-                  <a:srgbClr val="FF0000"/>
-                </a:solidFill>
-                <a:latin typeface="Times New Roman" pitchFamily="18" charset="0"/>
-                <a:cs typeface="Times New Roman" pitchFamily="18" charset="0"/>
+            <a:endParaRPr lang="en-US" dirty="0">
+              <a:latin typeface="Times New Roman" panose="02020603050405020304" pitchFamily="18" charset="0"/>
+              <a:cs typeface="Times New Roman" panose="02020603050405020304" pitchFamily="18" charset="0"/>
+            </a:endParaRPr>
+          </a:p>
+          <a:p>
+            <a:pPr algn="ctr"/>
+            <a:r>
+              <a:rPr lang="en-US" sz="1900" b="1" dirty="0">
+                <a:latin typeface="Times New Roman" panose="02020603050405020304" pitchFamily="18" charset="0"/>
+                <a:cs typeface="Times New Roman" panose="02020603050405020304" pitchFamily="18" charset="0"/>
+              </a:rPr>
+              <a:t>Digital Forgetting: Is Selective Memory Essential for Artificial Intelligence?</a:t>
+            </a:r>
+            <a:endParaRPr lang="en-IN" sz="1900" b="1" dirty="0">
+              <a:latin typeface="Times New Roman" panose="02020603050405020304" pitchFamily="18" charset="0"/>
+              <a:cs typeface="Times New Roman" panose="02020603050405020304" pitchFamily="18" charset="0"/>
+            </a:endParaRPr>
+          </a:p>
+          <a:p>
+            <a:pPr algn="ctr"/>
+            <a:endParaRPr lang="en-US" dirty="0">
+              <a:latin typeface="Times New Roman" panose="02020603050405020304" pitchFamily="18" charset="0"/>
+              <a:cs typeface="Times New Roman" panose="02020603050405020304" pitchFamily="18" charset="0"/>
+            </a:endParaRPr>
+          </a:p>
+          <a:p>
+            <a:pPr algn="ctr"/>
+            <a:r>
+              <a:rPr lang="en-US" dirty="0">
+                <a:latin typeface="Times New Roman" panose="02020603050405020304" pitchFamily="18" charset="0"/>
+                <a:cs typeface="Times New Roman" panose="02020603050405020304" pitchFamily="18" charset="0"/>
+              </a:rPr>
+              <a:t>Anubha Khanna   - 2210991313</a:t>
+            </a:r>
+          </a:p>
+          <a:p>
+            <a:pPr algn="ctr"/>
+            <a:r>
+              <a:rPr lang="en-US" dirty="0">
+                <a:latin typeface="Times New Roman" panose="02020603050405020304" pitchFamily="18" charset="0"/>
+                <a:cs typeface="Times New Roman" panose="02020603050405020304" pitchFamily="18" charset="0"/>
+              </a:rPr>
+              <a:t>Ansh Goyal          - 2210991294</a:t>
+            </a:r>
+          </a:p>
+          <a:p>
+            <a:pPr algn="ctr"/>
+            <a:r>
+              <a:rPr lang="en-US" dirty="0">
+                <a:latin typeface="Times New Roman" panose="02020603050405020304" pitchFamily="18" charset="0"/>
+                <a:cs typeface="Times New Roman" panose="02020603050405020304" pitchFamily="18" charset="0"/>
+              </a:rPr>
+              <a:t>Anisha Singh       - 2210991274</a:t>
+            </a:r>
+          </a:p>
+          <a:p>
+            <a:pPr algn="ctr"/>
+            <a:r>
+              <a:rPr lang="en-US" dirty="0">
+                <a:latin typeface="Times New Roman" panose="02020603050405020304" pitchFamily="18" charset="0"/>
+                <a:cs typeface="Times New Roman" panose="02020603050405020304" pitchFamily="18" charset="0"/>
+              </a:rPr>
+              <a:t>Abhijeet Sharma  - 2210991150</a:t>
+            </a:r>
+          </a:p>
+          <a:p>
+            <a:pPr algn="ctr"/>
+            <a:endParaRPr lang="en-US" dirty="0">
+              <a:latin typeface="Times New Roman" panose="02020603050405020304" pitchFamily="18" charset="0"/>
+              <a:cs typeface="Times New Roman" panose="02020603050405020304" pitchFamily="18" charset="0"/>
+            </a:endParaRPr>
+          </a:p>
+          <a:p>
+            <a:pPr algn="ctr"/>
+            <a:r>
+              <a:rPr lang="en-US" dirty="0">
+                <a:latin typeface="Times New Roman" panose="02020603050405020304" pitchFamily="18" charset="0"/>
+                <a:cs typeface="Times New Roman" panose="02020603050405020304" pitchFamily="18" charset="0"/>
+              </a:rPr>
+              <a:t>Supervised By: Dr. Ajay Kumar</a:t>
+            </a:r>
+          </a:p>
+          <a:p>
+            <a:pPr algn="ctr"/>
+            <a:endParaRPr lang="en-US" dirty="0">
+              <a:latin typeface="Times New Roman" panose="02020603050405020304" pitchFamily="18" charset="0"/>
+              <a:cs typeface="Times New Roman" panose="02020603050405020304" pitchFamily="18" charset="0"/>
+            </a:endParaRPr>
+          </a:p>
+          <a:p>
+            <a:pPr algn="ctr"/>
+            <a:endParaRPr lang="en-US" dirty="0">
+              <a:latin typeface="Times New Roman" panose="02020603050405020304" pitchFamily="18" charset="0"/>
+              <a:cs typeface="Times New Roman" panose="02020603050405020304" pitchFamily="18" charset="0"/>
+            </a:endParaRPr>
+          </a:p>
+          <a:p>
+            <a:pPr algn="ctr"/>
+            <a:r>
+              <a:rPr lang="en-US" dirty="0">
+                <a:latin typeface="Times New Roman" panose="02020603050405020304" pitchFamily="18" charset="0"/>
+                <a:cs typeface="Times New Roman" panose="02020603050405020304" pitchFamily="18" charset="0"/>
+              </a:rPr>
+              <a:t>Department of Computer Science and Engineering,</a:t>
+            </a:r>
+          </a:p>
+          <a:p>
+            <a:pPr algn="ctr"/>
+            <a:endParaRPr lang="en-US" dirty="0">
+              <a:latin typeface="Times New Roman" panose="02020603050405020304" pitchFamily="18" charset="0"/>
+              <a:cs typeface="Times New Roman" panose="02020603050405020304" pitchFamily="18" charset="0"/>
+            </a:endParaRPr>
+          </a:p>
+          <a:p>
+            <a:pPr algn="ctr"/>
+            <a:r>
+              <a:rPr lang="en-US" dirty="0">
+                <a:latin typeface="Times New Roman" panose="02020603050405020304" pitchFamily="18" charset="0"/>
+                <a:cs typeface="Times New Roman" panose="02020603050405020304" pitchFamily="18" charset="0"/>
               </a:rPr>
               <a:t>Chitkara University, Punjab</a:t>
             </a:r>
-          </a:p>
-        </p:txBody>
-      </p:sp>
-      <p:sp>
-        <p:nvSpPr>
-          <p:cNvPr id="8" name="Slide Number Placeholder 7"/>
-          <p:cNvSpPr>
-            <a:spLocks noGrp="1"/>
-          </p:cNvSpPr>
-          <p:nvPr>
-            <p:ph type="sldNum" sz="quarter" idx="12"/>
-          </p:nvPr>
-        </p:nvSpPr>
-        <p:spPr/>
-        <p:txBody>
-          <a:bodyPr/>
-          <a:lstStyle/>
-          <a:p>
-            <a:fld id="{0F8887D6-2A35-42AC-99C1-5E14D32EE4CF}" type="slidenum">
-              <a:rPr lang="en-US" smtClean="0"/>
-              <a:pPr/>
-              <a:t>1</a:t>
-            </a:fld>
-            <a:endParaRPr lang="en-US" dirty="0"/>
+            <a:endParaRPr lang="en-IN" dirty="0">
+              <a:latin typeface="Times New Roman" panose="02020603050405020304" pitchFamily="18" charset="0"/>
+              <a:cs typeface="Times New Roman" panose="02020603050405020304" pitchFamily="18" charset="0"/>
+            </a:endParaRPr>
           </a:p>
         </p:txBody>
       </p:sp>
     </p:spTree>
+    <p:extLst>
+      <p:ext uri="{BB962C8B-B14F-4D97-AF65-F5344CB8AC3E}">
+        <p14:creationId xmlns:p14="http://schemas.microsoft.com/office/powerpoint/2010/main" val="4193452396"/>
+      </p:ext>
+    </p:extLst>
   </p:cSld>
   <p:clrMapOvr>
     <a:masterClrMapping/>
@@ -3675,6 +3640,111 @@
         </p:txBody>
       </p:sp>
     </p:spTree>
+  </p:cSld>
+  <p:clrMapOvr>
+    <a:masterClrMapping/>
+  </p:clrMapOvr>
+  <p:transition advTm="4000">
+    <p:cut/>
+  </p:transition>
+</p:sld>
+</file>
+
+<file path=ppt/slides/slide14.xml><?xml version="1.0" encoding="utf-8"?>
+<p:sld xmlns:a="http://schemas.openxmlformats.org/drawingml/2006/main" xmlns:r="http://schemas.openxmlformats.org/officeDocument/2006/relationships" xmlns:p="http://schemas.openxmlformats.org/presentationml/2006/main">
+  <p:cSld>
+    <p:spTree>
+      <p:nvGrpSpPr>
+        <p:cNvPr id="1" name=""/>
+        <p:cNvGrpSpPr/>
+        <p:nvPr/>
+      </p:nvGrpSpPr>
+      <p:grpSpPr>
+        <a:xfrm>
+          <a:off x="0" y="0"/>
+          <a:ext cx="0" cy="0"/>
+          <a:chOff x="0" y="0"/>
+          <a:chExt cx="0" cy="0"/>
+        </a:xfrm>
+      </p:grpSpPr>
+      <p:sp>
+        <p:nvSpPr>
+          <p:cNvPr id="2" name="Slide Number Placeholder 1">
+            <a:extLst>
+              <a:ext uri="{FF2B5EF4-FFF2-40B4-BE49-F238E27FC236}">
+                <a16:creationId xmlns:a16="http://schemas.microsoft.com/office/drawing/2014/main" id="{E829F87B-ED49-669D-770A-FDD1BE0A4EE9}"/>
+              </a:ext>
+            </a:extLst>
+          </p:cNvPr>
+          <p:cNvSpPr>
+            <a:spLocks noGrp="1"/>
+          </p:cNvSpPr>
+          <p:nvPr>
+            <p:ph type="sldNum" sz="quarter" idx="12"/>
+          </p:nvPr>
+        </p:nvSpPr>
+        <p:spPr/>
+        <p:txBody>
+          <a:bodyPr/>
+          <a:lstStyle/>
+          <a:p>
+            <a:fld id="{0F8887D6-2A35-42AC-99C1-5E14D32EE4CF}" type="slidenum">
+              <a:rPr lang="en-US" smtClean="0"/>
+              <a:pPr/>
+              <a:t>14</a:t>
+            </a:fld>
+            <a:endParaRPr lang="en-US" dirty="0"/>
+          </a:p>
+        </p:txBody>
+      </p:sp>
+      <p:sp>
+        <p:nvSpPr>
+          <p:cNvPr id="6" name="TextBox 5">
+            <a:extLst>
+              <a:ext uri="{FF2B5EF4-FFF2-40B4-BE49-F238E27FC236}">
+                <a16:creationId xmlns:a16="http://schemas.microsoft.com/office/drawing/2014/main" id="{4EEF9C1B-2A60-E36B-3790-E53ADA7D492A}"/>
+              </a:ext>
+            </a:extLst>
+          </p:cNvPr>
+          <p:cNvSpPr txBox="1"/>
+          <p:nvPr/>
+        </p:nvSpPr>
+        <p:spPr>
+          <a:xfrm>
+            <a:off x="2274426" y="3004952"/>
+            <a:ext cx="3809742" cy="923330"/>
+          </a:xfrm>
+          <a:prstGeom prst="rect">
+            <a:avLst/>
+          </a:prstGeom>
+          <a:noFill/>
+        </p:spPr>
+        <p:txBody>
+          <a:bodyPr wrap="square">
+            <a:spAutoFit/>
+          </a:bodyPr>
+          <a:lstStyle/>
+          <a:p>
+            <a:r>
+              <a:rPr lang="en-IN" sz="5400" b="0" i="0" u="none" strike="noStrike" dirty="0">
+                <a:solidFill>
+                  <a:srgbClr val="000000"/>
+                </a:solidFill>
+                <a:effectLst/>
+                <a:latin typeface="Times New Roman" panose="02020603050405020304" pitchFamily="18" charset="0"/>
+              </a:rPr>
+              <a:t>Thank You</a:t>
+            </a:r>
+            <a:endParaRPr lang="en-IN" dirty="0"/>
+          </a:p>
+        </p:txBody>
+      </p:sp>
+    </p:spTree>
+    <p:extLst>
+      <p:ext uri="{BB962C8B-B14F-4D97-AF65-F5344CB8AC3E}">
+        <p14:creationId xmlns:p14="http://schemas.microsoft.com/office/powerpoint/2010/main" val="293414206"/>
+      </p:ext>
+    </p:extLst>
   </p:cSld>
   <p:clrMapOvr>
     <a:masterClrMapping/>
